--- a/docs/shardic_deck_v3_2.pptx
+++ b/docs/shardic_deck_v3_2.pptx
@@ -5278,7 +5278,7 @@
                 <a:cs typeface="Calibri"/>
                 <a:sym typeface="Calibri"/>
               </a:rPr>
-              <a:t>github.com/splashd1/shardic</a:t>
+              <a:t>github.com/splashd1/shardic-crypt</a:t>
             </a:r>
             <a:endParaRPr b="0" i="0" sz="1200" u="none" cap="none" strike="noStrike">
               <a:solidFill>
@@ -31716,7 +31716,7 @@
                 <a:cs typeface="Calibri"/>
                 <a:sym typeface="Calibri"/>
               </a:rPr>
-              <a:t>github.com/splashd1/shardic</a:t>
+              <a:t>github.com/splashd1/shardic-crypt</a:t>
             </a:r>
             <a:endParaRPr b="0" i="0" sz="1300" u="none" cap="none" strike="noStrike">
               <a:solidFill>
